--- a/ClassGraph.pptx
+++ b/ClassGraph.pptx
@@ -6175,7 +6175,7 @@
                 <a:latin typeface="Consolas"/>
               </a:rPr>
               <a:t>ByteTrack now
-CAL Re-ID next</a:t>
+cloth-invariant Re-ID next</a:t>
             </a:r>
           </a:p>
         </p:txBody>
@@ -7132,7 +7132,7 @@
                 </a:solidFill>
                 <a:latin typeface="Consolas"/>
               </a:rPr>
-              <a:t>STTran-style decoder
+              <a:t>sequence decoder
 over the graph</a:t>
             </a:r>
           </a:p>
@@ -18223,7 +18223,7 @@
         <p:spPr>
           <a:xfrm>
             <a:off x="621792" y="694944"/>
-            <a:ext cx="10948111" cy="486918"/>
+            <a:ext cx="10948111" cy="918972"/>
           </a:xfrm>
           <a:prstGeom prst="rect">
             <a:avLst/>
@@ -18243,7 +18243,7 @@
                 </a:solidFill>
                 <a:latin typeface="Segoe UI Semibold"/>
               </a:rPr>
-              <a:t>Three base papers, one per technical pillar</a:t>
+              <a:t>Three base papers: robust temporal facial-signal modelling + group activity</a:t>
             </a:r>
           </a:p>
         </p:txBody>
@@ -18256,8 +18256,8 @@
         </p:nvSpPr>
         <p:spPr>
           <a:xfrm>
-            <a:off x="621792" y="1282445"/>
-            <a:ext cx="10765231" cy="223901"/>
+            <a:off x="621792" y="1714500"/>
+            <a:ext cx="10765231" cy="411225"/>
           </a:xfrm>
           <a:prstGeom prst="rect">
             <a:avLst/>
@@ -18282,7 +18282,7 @@
                 </a:solidFill>
                 <a:latin typeface="Segoe UI"/>
               </a:rPr>
-              <a:t>All three are peer-reviewed at top-tier venues (CVPR / ICCV), have public code, and map 1:1 onto a pillar of our architecture.</a:t>
+              <a:t>All three are peer-reviewed, address a real sub-problem we face, and are used for their method, not their task — see the note below on why.</a:t>
             </a:r>
           </a:p>
         </p:txBody>
@@ -18408,8 +18408,8 @@
         </p:nvSpPr>
         <p:spPr>
           <a:xfrm>
-            <a:off x="621792" y="1689227"/>
-            <a:ext cx="3503066" cy="3584448"/>
+            <a:off x="621792" y="2308606"/>
+            <a:ext cx="3503066" cy="3657600"/>
           </a:xfrm>
           <a:prstGeom prst="roundRect">
             <a:avLst>
@@ -18456,7 +18456,7 @@
         </p:nvSpPr>
         <p:spPr>
           <a:xfrm>
-            <a:off x="621792" y="1689227"/>
+            <a:off x="621792" y="2308606"/>
             <a:ext cx="3503066" cy="50292"/>
           </a:xfrm>
           <a:prstGeom prst="rect">
@@ -18500,7 +18500,7 @@
         </p:nvSpPr>
         <p:spPr>
           <a:xfrm>
-            <a:off x="822960" y="1908683"/>
+            <a:off x="822960" y="2491486"/>
             <a:ext cx="3100730" cy="219456"/>
           </a:xfrm>
           <a:prstGeom prst="rect">
@@ -18515,13 +18515,13 @@
           <a:lstStyle/>
           <a:p>
             <a:r>
-              <a:rPr sz="900" b="1" i="0">
+              <a:rPr sz="850" b="1" i="0">
                 <a:solidFill>
                   <a:srgbClr val="0E7C86"/>
                 </a:solidFill>
                 <a:latin typeface="Segoe UI Semibold"/>
               </a:rPr>
-              <a:t>PILLAR 1 · IDENTITY</a:t>
+              <a:t>TEMPORAL ROBUSTNESS · 1 OF 2</a:t>
             </a:r>
           </a:p>
         </p:txBody>
@@ -18534,7 +18534,7 @@
         </p:nvSpPr>
         <p:spPr>
           <a:xfrm>
-            <a:off x="822960" y="2183002"/>
+            <a:off x="822960" y="2747518"/>
             <a:ext cx="3100730" cy="822960"/>
           </a:xfrm>
           <a:prstGeom prst="rect">
@@ -18560,7 +18560,7 @@
                 </a:solidFill>
                 <a:latin typeface="Segoe UI Semibold"/>
               </a:rPr>
-              <a:t>Clothes-Changing Person Re-Identification With RGB Modality Only</a:t>
+              <a:t>Robust Dynamic Facial Expression Recognition</a:t>
             </a:r>
           </a:p>
         </p:txBody>
@@ -18573,8 +18573,8 @@
         </p:nvSpPr>
         <p:spPr>
           <a:xfrm>
-            <a:off x="822960" y="3042539"/>
-            <a:ext cx="3100730" cy="384048"/>
+            <a:off x="822960" y="3607054"/>
+            <a:ext cx="3100730" cy="420624"/>
           </a:xfrm>
           <a:prstGeom prst="rect">
             <a:avLst/>
@@ -18589,17 +18589,17 @@
           <a:p>
             <a:pPr>
               <a:lnSpc>
-                <a:spcPct val="116000"/>
+                <a:spcPct val="118000"/>
               </a:lnSpc>
             </a:pPr>
             <a:r>
-              <a:rPr sz="900" b="1" i="0">
+              <a:rPr sz="850" b="1" i="0">
                 <a:solidFill>
                   <a:srgbClr val="085961"/>
                 </a:solidFill>
                 <a:latin typeface="Segoe UI"/>
               </a:rPr>
-              <a:t>Gu, Chang, Ma, Bai, Shan &amp; Chen — CVPR 2022, pp. 1060–1069</a:t>
+              <a:t>Liu, Wang &amp; Shen — IEEE Trans. on Biometrics, Behavior, and Identity Science, 2025</a:t>
             </a:r>
           </a:p>
         </p:txBody>
@@ -18612,8 +18612,8 @@
         </p:nvSpPr>
         <p:spPr>
           <a:xfrm>
-            <a:off x="822960" y="3481450"/>
-            <a:ext cx="3100730" cy="1188720"/>
+            <a:off x="822960" y="4082542"/>
+            <a:ext cx="3100730" cy="987552"/>
           </a:xfrm>
           <a:prstGeom prst="rect">
             <a:avLst/>
@@ -18638,7 +18638,7 @@
                 </a:solidFill>
                 <a:latin typeface="Segoe UI"/>
               </a:rPr>
-              <a:t>Proposes a Clothes-based Adversarial Loss (CAL) that penalises the model's ability to predict clothing, forcing it to learn clothes-irrelevant identity cues (face, hairstyle, body shape, gait) from RGB alone.</a:t>
+              <a:t>A dual-stream network that disentangles short-term facial movements from longer-term state, and explicitly separates genuinely hard samples from noisy/mislabelled ones using prediction agreement across resampled clips.</a:t>
             </a:r>
           </a:p>
         </p:txBody>
@@ -18651,7 +18651,7 @@
         </p:nvSpPr>
         <p:spPr>
           <a:xfrm>
-            <a:off x="822960" y="4670170"/>
+            <a:off x="822960" y="5106670"/>
             <a:ext cx="3100730" cy="10972"/>
           </a:xfrm>
           <a:prstGeom prst="rect">
@@ -18695,8 +18695,8 @@
         </p:nvSpPr>
         <p:spPr>
           <a:xfrm>
-            <a:off x="822960" y="4779899"/>
-            <a:ext cx="3100730" cy="438912"/>
+            <a:off x="822960" y="5198110"/>
+            <a:ext cx="3100730" cy="731520"/>
           </a:xfrm>
           <a:prstGeom prst="rect">
             <a:avLst/>
@@ -18721,7 +18721,7 @@
                 </a:solidFill>
                 <a:latin typeface="Segoe UI"/>
               </a:rPr>
-              <a:t>What we take: identity that survives appearance change and occlusion, so a student who turns away and back is not counted as a new person.</a:t>
+              <a:t>What we take: NOT emotion classification. We take the principle of separating a momentary signal from a sustained state — our 15-second rolling window does exactly this for gaze and posture.</a:t>
             </a:r>
           </a:p>
         </p:txBody>
@@ -18734,8 +18734,8 @@
         </p:nvSpPr>
         <p:spPr>
           <a:xfrm>
-            <a:off x="4344314" y="1689227"/>
-            <a:ext cx="3503066" cy="3584448"/>
+            <a:off x="4344314" y="2308606"/>
+            <a:ext cx="3503066" cy="3657600"/>
           </a:xfrm>
           <a:prstGeom prst="roundRect">
             <a:avLst>
@@ -18782,7 +18782,7 @@
         </p:nvSpPr>
         <p:spPr>
           <a:xfrm>
-            <a:off x="4344314" y="1689227"/>
+            <a:off x="4344314" y="2308606"/>
             <a:ext cx="3503066" cy="50292"/>
           </a:xfrm>
           <a:prstGeom prst="rect">
@@ -18826,7 +18826,7 @@
         </p:nvSpPr>
         <p:spPr>
           <a:xfrm>
-            <a:off x="4545482" y="1908683"/>
+            <a:off x="4545482" y="2491486"/>
             <a:ext cx="3100730" cy="219456"/>
           </a:xfrm>
           <a:prstGeom prst="rect">
@@ -18841,13 +18841,13 @@
           <a:lstStyle/>
           <a:p>
             <a:r>
-              <a:rPr sz="900" b="1" i="0">
+              <a:rPr sz="850" b="1" i="0">
                 <a:solidFill>
                   <a:srgbClr val="0E7C86"/>
                 </a:solidFill>
                 <a:latin typeface="Segoe UI Semibold"/>
               </a:rPr>
-              <a:t>PILLAR 2 · RELATIONS OVER TIME</a:t>
+              <a:t>TEMPORAL ROBUSTNESS · 2 OF 2</a:t>
             </a:r>
           </a:p>
         </p:txBody>
@@ -18860,7 +18860,7 @@
         </p:nvSpPr>
         <p:spPr>
           <a:xfrm>
-            <a:off x="4545482" y="2183002"/>
+            <a:off x="4545482" y="2747518"/>
             <a:ext cx="3100730" cy="822960"/>
           </a:xfrm>
           <a:prstGeom prst="rect">
@@ -18886,7 +18886,7 @@
                 </a:solidFill>
                 <a:latin typeface="Segoe UI Semibold"/>
               </a:rPr>
-              <a:t>Spatial-Temporal Transformer for Dynamic Scene Graph Generation</a:t>
+              <a:t>Dynamic Objectives Learning for Facial Expression Recognition</a:t>
             </a:r>
           </a:p>
         </p:txBody>
@@ -18899,8 +18899,8 @@
         </p:nvSpPr>
         <p:spPr>
           <a:xfrm>
-            <a:off x="4545482" y="3042539"/>
-            <a:ext cx="3100730" cy="384048"/>
+            <a:off x="4545482" y="3607054"/>
+            <a:ext cx="3100730" cy="420624"/>
           </a:xfrm>
           <a:prstGeom prst="rect">
             <a:avLst/>
@@ -18915,17 +18915,17 @@
           <a:p>
             <a:pPr>
               <a:lnSpc>
-                <a:spcPct val="116000"/>
+                <a:spcPct val="118000"/>
               </a:lnSpc>
             </a:pPr>
             <a:r>
-              <a:rPr sz="900" b="1" i="0">
+              <a:rPr sz="850" b="1" i="0">
                 <a:solidFill>
                   <a:srgbClr val="085961"/>
                 </a:solidFill>
                 <a:latin typeface="Segoe UI"/>
               </a:rPr>
-              <a:t>Cong, Liao, Ackermann, Rosenhahn &amp; Yang — ICCV 2021</a:t>
+              <a:t>Wen, Chang, Li &amp; Jiang — IEEE Trans. on Multimedia, vol. 22, pp. 2914–2925, 2020</a:t>
             </a:r>
           </a:p>
         </p:txBody>
@@ -18938,8 +18938,8 @@
         </p:nvSpPr>
         <p:spPr>
           <a:xfrm>
-            <a:off x="4545482" y="3481450"/>
-            <a:ext cx="3100730" cy="1188720"/>
+            <a:off x="4545482" y="4082542"/>
+            <a:ext cx="3100730" cy="987552"/>
           </a:xfrm>
           <a:prstGeom prst="rect">
             <a:avLst/>
@@ -18964,7 +18964,7 @@
                 </a:solidFill>
                 <a:latin typeface="Segoe UI"/>
               </a:rPr>
-              <a:t>STTran pairs a spatial encoder (relations within a frame) with a temporal decoder (dependencies across frames), and accepts variable-length video without clipping. Benchmarked on Action Genome.</a:t>
+              <a:t>Splits training into stages with different objectives, and proposes a loss that explicitly widens the gap between easily-confused expression categories rather than forcing every sample into a single confident class.</a:t>
             </a:r>
           </a:p>
         </p:txBody>
@@ -18977,7 +18977,7 @@
         </p:nvSpPr>
         <p:spPr>
           <a:xfrm>
-            <a:off x="4545482" y="4670170"/>
+            <a:off x="4545482" y="5106670"/>
             <a:ext cx="3100730" cy="10972"/>
           </a:xfrm>
           <a:prstGeom prst="rect">
@@ -19021,8 +19021,8 @@
         </p:nvSpPr>
         <p:spPr>
           <a:xfrm>
-            <a:off x="4545482" y="4779899"/>
-            <a:ext cx="3100730" cy="438912"/>
+            <a:off x="4545482" y="5198110"/>
+            <a:ext cx="3100730" cy="731520"/>
           </a:xfrm>
           <a:prstGeom prst="rect">
             <a:avLst/>
@@ -19047,7 +19047,7 @@
                 </a:solidFill>
                 <a:latin typeface="Segoe UI"/>
               </a:rPr>
-              <a:t>What we take: the dynamic scene-graph formulation and the temporal decoder — our classroom graph must evolve, not be re-guessed every frame.</a:t>
+              <a:t>What we take: the same lesson without training a classifier — our “head-down, no device” category stays deliberately separate and uncertain instead of being forced into “engaged” or “distracted”.</a:t>
             </a:r>
           </a:p>
         </p:txBody>
@@ -19060,8 +19060,8 @@
         </p:nvSpPr>
         <p:spPr>
           <a:xfrm>
-            <a:off x="8066836" y="1689227"/>
-            <a:ext cx="3503066" cy="3584448"/>
+            <a:off x="8066836" y="2308606"/>
+            <a:ext cx="3503066" cy="3657600"/>
           </a:xfrm>
           <a:prstGeom prst="roundRect">
             <a:avLst>
@@ -19108,7 +19108,7 @@
         </p:nvSpPr>
         <p:spPr>
           <a:xfrm>
-            <a:off x="8066836" y="1689227"/>
+            <a:off x="8066836" y="2308606"/>
             <a:ext cx="3503066" cy="50292"/>
           </a:xfrm>
           <a:prstGeom prst="rect">
@@ -19152,7 +19152,7 @@
         </p:nvSpPr>
         <p:spPr>
           <a:xfrm>
-            <a:off x="8268004" y="1908683"/>
+            <a:off x="8268004" y="2491486"/>
             <a:ext cx="3100730" cy="219456"/>
           </a:xfrm>
           <a:prstGeom prst="rect">
@@ -19167,13 +19167,13 @@
           <a:lstStyle/>
           <a:p>
             <a:r>
-              <a:rPr sz="900" b="1" i="0">
+              <a:rPr sz="850" b="1" i="0">
                 <a:solidFill>
                   <a:srgbClr val="0E7C86"/>
                 </a:solidFill>
                 <a:latin typeface="Segoe UI Semibold"/>
               </a:rPr>
-              <a:t>PILLAR 3 · THE GROUP</a:t>
+              <a:t>GROUP-LEVEL REASONING</a:t>
             </a:r>
           </a:p>
         </p:txBody>
@@ -19186,7 +19186,7 @@
         </p:nvSpPr>
         <p:spPr>
           <a:xfrm>
-            <a:off x="8268004" y="2183002"/>
+            <a:off x="8268004" y="2747518"/>
             <a:ext cx="3100730" cy="822960"/>
           </a:xfrm>
           <a:prstGeom prst="rect">
@@ -19225,8 +19225,8 @@
         </p:nvSpPr>
         <p:spPr>
           <a:xfrm>
-            <a:off x="8268004" y="3042539"/>
-            <a:ext cx="3100730" cy="384048"/>
+            <a:off x="8268004" y="3607054"/>
+            <a:ext cx="3100730" cy="420624"/>
           </a:xfrm>
           <a:prstGeom prst="rect">
             <a:avLst/>
@@ -19241,11 +19241,11 @@
           <a:p>
             <a:pPr>
               <a:lnSpc>
-                <a:spcPct val="116000"/>
+                <a:spcPct val="118000"/>
               </a:lnSpc>
             </a:pPr>
             <a:r>
-              <a:rPr sz="900" b="1" i="0">
+              <a:rPr sz="850" b="1" i="0">
                 <a:solidFill>
                   <a:srgbClr val="085961"/>
                 </a:solidFill>
@@ -19264,8 +19264,8 @@
         </p:nvSpPr>
         <p:spPr>
           <a:xfrm>
-            <a:off x="8268004" y="3481450"/>
-            <a:ext cx="3100730" cy="1188720"/>
+            <a:off x="8268004" y="4082542"/>
+            <a:ext cx="3100730" cy="987552"/>
           </a:xfrm>
           <a:prstGeom prst="rect">
             <a:avLst/>
@@ -19290,7 +19290,7 @@
                 </a:solidFill>
                 <a:latin typeface="Segoe UI"/>
               </a:rPr>
-              <a:t>Builds an Actor Relation Graph capturing both appearance and position relations between actors, learned end-to-end with a GCN; adds spatially localised and temporally randomised sparsification. Benchmarked on Volleyball and Collective Activity.</a:t>
+              <a:t>Builds an Actor Relation Graph capturing both appearance and position relations between actors, learned end-to-end with a GCN. Benchmarked on Volleyball and Collective Activity.</a:t>
             </a:r>
           </a:p>
         </p:txBody>
@@ -19303,7 +19303,7 @@
         </p:nvSpPr>
         <p:spPr>
           <a:xfrm>
-            <a:off x="8268004" y="4670170"/>
+            <a:off x="8268004" y="5106670"/>
             <a:ext cx="3100730" cy="10972"/>
           </a:xfrm>
           <a:prstGeom prst="rect">
@@ -19347,8 +19347,8 @@
         </p:nvSpPr>
         <p:spPr>
           <a:xfrm>
-            <a:off x="8268004" y="4779899"/>
-            <a:ext cx="3100730" cy="438912"/>
+            <a:off x="8268004" y="5198110"/>
+            <a:ext cx="3100730" cy="731520"/>
           </a:xfrm>
           <a:prstGeom prst="rect">
             <a:avLst/>
@@ -19373,7 +19373,7 @@
                 </a:solidFill>
                 <a:latin typeface="Segoe UI"/>
               </a:rPr>
-              <a:t>What we take: the actor-relation graph + GCN readout to turn per-student states into one class-level activity label.</a:t>
+              <a:t>What we take: the actor-relation graph + GCN readout to turn per-student states into one class-level activity label — used directly, not adapted.</a:t>
             </a:r>
           </a:p>
         </p:txBody>
@@ -19386,7 +19386,7 @@
         </p:nvSpPr>
         <p:spPr>
           <a:xfrm>
-            <a:off x="621792" y="5438266"/>
+            <a:off x="621792" y="6094222"/>
             <a:ext cx="10948111" cy="731520"/>
           </a:xfrm>
           <a:prstGeom prst="roundRect">
@@ -19434,7 +19434,7 @@
         </p:nvSpPr>
         <p:spPr>
           <a:xfrm>
-            <a:off x="859536" y="5566283"/>
+            <a:off x="859536" y="6222238"/>
             <a:ext cx="10472623" cy="512064"/>
           </a:xfrm>
           <a:prstGeom prst="rect">
@@ -19460,7 +19460,7 @@
                 </a:solidFill>
                 <a:latin typeface="Segoe UI Semibold"/>
               </a:rPr>
-              <a:t>Correctness of selection:  </a:t>
+              <a:t>Why facial-expression papers for a system that doesn't classify emotion:  </a:t>
             </a:r>
             <a:r>
               <a:rPr sz="1100" b="0" i="0">
@@ -19469,7 +19469,7 @@
                 </a:solidFill>
                 <a:latin typeface="Segoe UI"/>
               </a:rPr>
-              <a:t>each paper is the standard reference for its pillar, not a peripheral choice. Our novelty is not in re-deriving any one of them — it is in fusing all three in a domain none of them targets.</a:t>
+              <a:t>we deliberately excluded emotion inference (see slide 3), but the *methodology* both papers use for handling ambiguous, noisy facial signal over time is exactly our problem too — we cite the technique, not the task.</a:t>
             </a:r>
           </a:p>
         </p:txBody>
@@ -20021,8 +20021,8 @@
                           </a:solidFill>
                           <a:latin typeface="Segoe UI"/>
                         </a:rPr>
-                        <a:t>Video scene
-graph</a:t>
+                        <a:t>Dynamic/robust
+facial signal</a:t>
                       </a:r>
                     </a:p>
                   </a:txBody>
@@ -20044,7 +20044,8 @@
                           </a:solidFill>
                           <a:latin typeface="Segoe UI"/>
                         </a:rPr>
-                        <a:t>STTran (ICCV 2021)</a:t>
+                        <a:t>Liu et al. (2025);
+Wen et al. (2020)</a:t>
                       </a:r>
                     </a:p>
                   </a:txBody>
@@ -20066,7 +20067,7 @@
                           </a:solidFill>
                           <a:latin typeface="Segoe UI"/>
                         </a:rPr>
-                        <a:t>Spatial encoder + temporal decoder over variable-length video</a:t>
+                        <a:t>Disentangle short-term movement from sustained state; separate hard samples from noisy ones</a:t>
                       </a:r>
                     </a:p>
                   </a:txBody>
@@ -20088,7 +20089,7 @@
                           </a:solidFill>
                           <a:latin typeface="Segoe UI"/>
                         </a:rPr>
-                        <a:t>Action Genome</a:t>
+                        <a:t>DFEW, FERV39K</a:t>
                       </a:r>
                     </a:p>
                   </a:txBody>
@@ -20110,7 +20111,7 @@
                           </a:solidFill>
                           <a:latin typeface="Segoe UI"/>
                         </a:rPr>
-                        <a:t>Generic object–object predicates; nothing for attention, gaze or education</a:t>
+                        <a:t>Built for emotion classification, not behaviour geometry — we take the method (temporal + ambiguity handling), not the task</a:t>
                       </a:r>
                     </a:p>
                   </a:txBody>
